--- a/Jeff_와_ai_상호작용.pptx
+++ b/Jeff_와_ai_상호작용.pptx
@@ -16097,7 +16097,7 @@
         <p:spPr>
           <a:xfrm>
             <a:off x="986925" y="2638900"/>
-            <a:ext cx="10332600" cy="523200"/>
+            <a:ext cx="10332600" cy="3568065"/>
           </a:xfrm>
           <a:prstGeom prst="rect">
             <a:avLst/>
@@ -16146,6 +16146,26 @@
               </a:rPr>
               <a:t>Very Much !</a:t>
             </a:r>
+            <a:endParaRPr lang="en-US" sz="2800" b="1">
+              <a:solidFill>
+                <a:srgbClr val="FFD166"/>
+              </a:solidFill>
+              <a:latin typeface="Calibri" panose="020F0502020204030204"/>
+              <a:ea typeface="Calibri" panose="020F0502020204030204"/>
+              <a:cs typeface="Calibri" panose="020F0502020204030204"/>
+              <a:sym typeface="Calibri" panose="020F0502020204030204"/>
+            </a:endParaRPr>
+          </a:p>
+          <a:p>
+            <a:pPr marL="0" marR="0" lvl="0" indent="0" algn="ctr" rtl="0">
+              <a:spcBef>
+                <a:spcPts val="0"/>
+              </a:spcBef>
+              <a:spcAft>
+                <a:spcPts val="0"/>
+              </a:spcAft>
+              <a:buNone/>
+            </a:pPr>
             <a:endParaRPr sz="2800" b="1" i="0">
               <a:solidFill>
                 <a:srgbClr val="FFD166"/>
@@ -16154,6 +16174,236 @@
               <a:ea typeface="Calibri" panose="020F0502020204030204"/>
               <a:cs typeface="Calibri" panose="020F0502020204030204"/>
               <a:sym typeface="Calibri" panose="020F0502020204030204"/>
+            </a:endParaRPr>
+          </a:p>
+          <a:p>
+            <a:pPr marL="0" marR="0" lvl="0" indent="0" algn="ctr" rtl="0">
+              <a:spcBef>
+                <a:spcPts val="0"/>
+              </a:spcBef>
+              <a:spcAft>
+                <a:spcPts val="0"/>
+              </a:spcAft>
+              <a:buNone/>
+            </a:pPr>
+            <a:endParaRPr sz="2800" b="1" i="0">
+              <a:solidFill>
+                <a:srgbClr val="FFD166"/>
+              </a:solidFill>
+              <a:latin typeface="Calibri" panose="020F0502020204030204"/>
+              <a:ea typeface="Calibri" panose="020F0502020204030204"/>
+              <a:cs typeface="Calibri" panose="020F0502020204030204"/>
+              <a:sym typeface="Calibri" panose="020F0502020204030204"/>
+            </a:endParaRPr>
+          </a:p>
+          <a:p>
+            <a:pPr marL="0" marR="0" lvl="0" indent="0" algn="ctr" rtl="0">
+              <a:spcBef>
+                <a:spcPts val="0"/>
+              </a:spcBef>
+              <a:spcAft>
+                <a:spcPts val="0"/>
+              </a:spcAft>
+              <a:buNone/>
+            </a:pPr>
+            <a:endParaRPr sz="2800" b="1" i="0">
+              <a:solidFill>
+                <a:srgbClr val="FFD166"/>
+              </a:solidFill>
+              <a:latin typeface="Calibri" panose="020F0502020204030204"/>
+              <a:ea typeface="Calibri" panose="020F0502020204030204"/>
+              <a:cs typeface="Calibri" panose="020F0502020204030204"/>
+              <a:sym typeface="Calibri" panose="020F0502020204030204"/>
+            </a:endParaRPr>
+          </a:p>
+          <a:p>
+            <a:pPr marL="0" marR="0" lvl="0" indent="0" algn="ctr" rtl="0">
+              <a:spcBef>
+                <a:spcPts val="0"/>
+              </a:spcBef>
+              <a:spcAft>
+                <a:spcPts val="0"/>
+              </a:spcAft>
+              <a:buNone/>
+            </a:pPr>
+            <a:endParaRPr sz="2800" b="1" i="0">
+              <a:solidFill>
+                <a:srgbClr val="FFD166"/>
+              </a:solidFill>
+              <a:latin typeface="Calibri" panose="020F0502020204030204"/>
+              <a:ea typeface="Calibri" panose="020F0502020204030204"/>
+              <a:cs typeface="Calibri" panose="020F0502020204030204"/>
+              <a:sym typeface="Calibri" panose="020F0502020204030204"/>
+            </a:endParaRPr>
+          </a:p>
+          <a:p>
+            <a:pPr marL="0" marR="0" lvl="0" indent="0" algn="ctr" rtl="0">
+              <a:spcBef>
+                <a:spcPts val="0"/>
+              </a:spcBef>
+              <a:spcAft>
+                <a:spcPts val="0"/>
+              </a:spcAft>
+              <a:buNone/>
+            </a:pPr>
+            <a:endParaRPr sz="2800" b="1" i="0">
+              <a:solidFill>
+                <a:srgbClr val="FFD166"/>
+              </a:solidFill>
+              <a:latin typeface="Calibri" panose="020F0502020204030204"/>
+              <a:ea typeface="Calibri" panose="020F0502020204030204"/>
+              <a:cs typeface="Calibri" panose="020F0502020204030204"/>
+              <a:sym typeface="Calibri" panose="020F0502020204030204"/>
+            </a:endParaRPr>
+          </a:p>
+          <a:p>
+            <a:pPr marL="0" marR="0" lvl="0" indent="0" algn="r" rtl="0">
+              <a:spcBef>
+                <a:spcPts val="0"/>
+              </a:spcBef>
+              <a:spcAft>
+                <a:spcPts val="0"/>
+              </a:spcAft>
+              <a:buNone/>
+            </a:pPr>
+            <a:r>
+              <a:rPr lang="en-US" altLang="en-US" sz="1200" b="1" i="0">
+                <a:solidFill>
+                  <a:schemeClr val="bg1">
+                    <a:lumMod val="65000"/>
+                  </a:schemeClr>
+                </a:solidFill>
+                <a:latin typeface="Calibri" panose="020F0502020204030204"/>
+                <a:ea typeface="Calibri" panose="020F0502020204030204"/>
+                <a:cs typeface="Calibri" panose="020F0502020204030204"/>
+                <a:sym typeface="Calibri" panose="020F0502020204030204"/>
+              </a:rPr>
+              <a:t>https://github.com/jeff-bae/pocket-kit</a:t>
+            </a:r>
+            <a:endParaRPr lang="en-US" altLang="en-US" sz="1200" b="1" i="0">
+              <a:solidFill>
+                <a:schemeClr val="bg1">
+                  <a:lumMod val="65000"/>
+                </a:schemeClr>
+              </a:solidFill>
+              <a:latin typeface="Calibri" panose="020F0502020204030204"/>
+              <a:ea typeface="Calibri" panose="020F0502020204030204"/>
+              <a:cs typeface="Calibri" panose="020F0502020204030204"/>
+              <a:sym typeface="Calibri" panose="020F0502020204030204"/>
+            </a:endParaRPr>
+          </a:p>
+          <a:p>
+            <a:pPr marL="0" marR="0" lvl="0" indent="0" algn="r" rtl="0">
+              <a:spcBef>
+                <a:spcPts val="0"/>
+              </a:spcBef>
+              <a:spcAft>
+                <a:spcPts val="0"/>
+              </a:spcAft>
+              <a:buNone/>
+            </a:pPr>
+            <a:r>
+              <a:rPr lang="en-US" altLang="en-US" sz="1200" b="1" i="0">
+                <a:solidFill>
+                  <a:schemeClr val="bg1">
+                    <a:lumMod val="65000"/>
+                  </a:schemeClr>
+                </a:solidFill>
+                <a:latin typeface="Calibri" panose="020F0502020204030204"/>
+                <a:ea typeface="Calibri" panose="020F0502020204030204"/>
+                <a:cs typeface="Calibri" panose="020F0502020204030204"/>
+                <a:sym typeface="Calibri" panose="020F0502020204030204"/>
+              </a:rPr>
+              <a:t>https://github.com/jeff-bae/ai-db-mcp.git</a:t>
+            </a:r>
+            <a:endParaRPr lang="en-US" altLang="en-US" sz="1200" b="1" i="0">
+              <a:solidFill>
+                <a:schemeClr val="bg1">
+                  <a:lumMod val="65000"/>
+                </a:schemeClr>
+              </a:solidFill>
+              <a:latin typeface="Calibri" panose="020F0502020204030204"/>
+              <a:ea typeface="Calibri" panose="020F0502020204030204"/>
+              <a:cs typeface="Calibri" panose="020F0502020204030204"/>
+              <a:sym typeface="Calibri" panose="020F0502020204030204"/>
+            </a:endParaRPr>
+          </a:p>
+          <a:p>
+            <a:pPr marL="0" marR="0" lvl="0" indent="0" algn="r" rtl="0">
+              <a:spcBef>
+                <a:spcPts val="0"/>
+              </a:spcBef>
+              <a:spcAft>
+                <a:spcPts val="0"/>
+              </a:spcAft>
+              <a:buNone/>
+            </a:pPr>
+            <a:endParaRPr lang="en-US" altLang="en-US" sz="1200" b="1" i="0">
+              <a:solidFill>
+                <a:schemeClr val="bg1">
+                  <a:lumMod val="65000"/>
+                </a:schemeClr>
+              </a:solidFill>
+              <a:latin typeface="Calibri" panose="020F0502020204030204"/>
+              <a:ea typeface="Calibri" panose="020F0502020204030204"/>
+              <a:cs typeface="Calibri" panose="020F0502020204030204"/>
+              <a:sym typeface="Calibri" panose="020F0502020204030204"/>
+            </a:endParaRPr>
+          </a:p>
+          <a:p>
+            <a:pPr marL="0" marR="0" lvl="0" indent="0" algn="r" rtl="0">
+              <a:spcBef>
+                <a:spcPts val="0"/>
+              </a:spcBef>
+              <a:spcAft>
+                <a:spcPts val="0"/>
+              </a:spcAft>
+              <a:buNone/>
+            </a:pPr>
+            <a:endParaRPr lang="en-US" altLang="en-US" sz="1200" b="1" i="0">
+              <a:solidFill>
+                <a:schemeClr val="bg1">
+                  <a:lumMod val="65000"/>
+                </a:schemeClr>
+              </a:solidFill>
+              <a:latin typeface="Calibri" panose="020F0502020204030204"/>
+              <a:ea typeface="Calibri" panose="020F0502020204030204"/>
+              <a:cs typeface="Calibri" panose="020F0502020204030204"/>
+              <a:sym typeface="Calibri" panose="020F0502020204030204"/>
+            </a:endParaRPr>
+          </a:p>
+          <a:p>
+            <a:pPr marL="0" marR="0" lvl="0" indent="0" algn="r" rtl="0">
+              <a:spcBef>
+                <a:spcPts val="0"/>
+              </a:spcBef>
+              <a:spcAft>
+                <a:spcPts val="0"/>
+              </a:spcAft>
+              <a:buNone/>
+            </a:pPr>
+            <a:r>
+              <a:rPr lang="en-US" altLang="en-US" sz="1000" i="0">
+                <a:solidFill>
+                  <a:srgbClr val="1A1A2E"/>
+                </a:solidFill>
+                <a:latin typeface="Calibri" panose="020F0502020204030204"/>
+                <a:ea typeface="Calibri" panose="020F0502020204030204"/>
+                <a:cs typeface="Calibri" panose="020F0502020204030204"/>
+                <a:sym typeface="Calibri" panose="020F0502020204030204"/>
+                <a:hlinkClick r:id="rId1" tooltip="" action="ppaction://hlinkfile"/>
+              </a:rPr>
+              <a:t>https://jeff-bae-ai-db-mcp-juevzgw1jk.app.codeanywhere.com/?folder=/workspaces/ai-db-mcp</a:t>
+            </a:r>
+            <a:endParaRPr lang="en-US" altLang="en-US" sz="1000" i="0">
+              <a:solidFill>
+                <a:srgbClr val="1A1A2E"/>
+              </a:solidFill>
+              <a:latin typeface="Calibri" panose="020F0502020204030204"/>
+              <a:ea typeface="Calibri" panose="020F0502020204030204"/>
+              <a:cs typeface="Calibri" panose="020F0502020204030204"/>
+              <a:sym typeface="Calibri" panose="020F0502020204030204"/>
+              <a:hlinkClick r:id="rId1" tooltip="" action="ppaction://hlinkfile"/>
             </a:endParaRPr>
           </a:p>
         </p:txBody>

--- a/Jeff_와_ai_상호작용.pptx
+++ b/Jeff_와_ai_상호작용.pptx
@@ -16382,19 +16382,6 @@
               </a:spcAft>
               <a:buNone/>
             </a:pPr>
-            <a:r>
-              <a:rPr lang="en-US" altLang="en-US" sz="1000" i="0">
-                <a:solidFill>
-                  <a:srgbClr val="1A1A2E"/>
-                </a:solidFill>
-                <a:latin typeface="Calibri" panose="020F0502020204030204"/>
-                <a:ea typeface="Calibri" panose="020F0502020204030204"/>
-                <a:cs typeface="Calibri" panose="020F0502020204030204"/>
-                <a:sym typeface="Calibri" panose="020F0502020204030204"/>
-                <a:hlinkClick r:id="rId1" tooltip="" action="ppaction://hlinkfile"/>
-              </a:rPr>
-              <a:t>https://jeff-bae-ai-db-mcp-juevzgw1jk.app.codeanywhere.com/?folder=/workspaces/ai-db-mcp</a:t>
-            </a:r>
             <a:endParaRPr lang="en-US" altLang="en-US" sz="1000" i="0">
               <a:solidFill>
                 <a:srgbClr val="1A1A2E"/>
@@ -16403,7 +16390,7 @@
               <a:ea typeface="Calibri" panose="020F0502020204030204"/>
               <a:cs typeface="Calibri" panose="020F0502020204030204"/>
               <a:sym typeface="Calibri" panose="020F0502020204030204"/>
-              <a:hlinkClick r:id="rId1" tooltip="" action="ppaction://hlinkfile"/>
+              <a:hlinkClick r:id="rId1" action="ppaction://hlinkfile"/>
             </a:endParaRPr>
           </a:p>
         </p:txBody>
